--- a/alzan/manuels/manual_en.pptx
+++ b/alzan/manuels/manual_en.pptx
@@ -107,6 +107,11 @@
       </a:defRPr>
     </a:lvl9pPr>
   </p:defaultTextStyle>
+  <p:extLst>
+    <p:ext uri="{EFAFB233-063F-42B5-8137-9DF3F51BA10A}">
+      <p15:sldGuideLst xmlns:p15="http://schemas.microsoft.com/office/powerpoint/2012/main"/>
+    </p:ext>
+  </p:extLst>
 </p:presentation>
 </file>
 
@@ -3583,8 +3588,25 @@
                 <a:latin typeface="MS Gothic" panose="020B0609070205080204" pitchFamily="49" charset="-128"/>
                 <a:ea typeface="MS Gothic" panose="020B0609070205080204" pitchFamily="49" charset="-128"/>
               </a:rPr>
-              <a:t>Apple II version</a:t>
-            </a:r>
+              <a:t>Apple </a:t>
+            </a:r>
+            <a:r>
+              <a:rPr lang="fr-FR" sz="1000">
+                <a:solidFill>
+                  <a:schemeClr val="bg2"/>
+                </a:solidFill>
+                <a:latin typeface="MS Gothic" panose="020B0609070205080204" pitchFamily="49" charset="-128"/>
+                <a:ea typeface="MS Gothic" panose="020B0609070205080204" pitchFamily="49" charset="-128"/>
+              </a:rPr>
+              <a:t>II 64K version</a:t>
+            </a:r>
+            <a:endParaRPr lang="fr-FR" sz="1000" dirty="0">
+              <a:solidFill>
+                <a:schemeClr val="bg2"/>
+              </a:solidFill>
+              <a:latin typeface="MS Gothic" panose="020B0609070205080204" pitchFamily="49" charset="-128"/>
+              <a:ea typeface="MS Gothic" panose="020B0609070205080204" pitchFamily="49" charset="-128"/>
+            </a:endParaRPr>
           </a:p>
           <a:p>
             <a:pPr marL="0" indent="0" algn="ctr">

--- a/alzan/manuels/manual_en.pptx
+++ b/alzan/manuels/manual_en.pptx
@@ -5043,24 +5043,14 @@
               <a:t>The </a:t>
             </a:r>
             <a:r>
-              <a:rPr lang="fr-FR" sz="1100" dirty="0" err="1">
-                <a:solidFill>
-                  <a:schemeClr val="bg2"/>
-                </a:solidFill>
-                <a:latin typeface="MS Gothic" panose="020B0609070205080204" pitchFamily="49" charset="-128"/>
-                <a:ea typeface="MS Gothic" panose="020B0609070205080204" pitchFamily="49" charset="-128"/>
-              </a:rPr>
-              <a:t>others</a:t>
-            </a:r>
-            <a:r>
-              <a:rPr lang="fr-FR" sz="1100" dirty="0">
-                <a:solidFill>
-                  <a:schemeClr val="bg2"/>
-                </a:solidFill>
-                <a:latin typeface="MS Gothic" panose="020B0609070205080204" pitchFamily="49" charset="-128"/>
-                <a:ea typeface="MS Gothic" panose="020B0609070205080204" pitchFamily="49" charset="-128"/>
-              </a:rPr>
-              <a:t> </a:t>
+              <a:rPr lang="fr-FR" sz="1100">
+                <a:solidFill>
+                  <a:schemeClr val="bg2"/>
+                </a:solidFill>
+                <a:latin typeface="MS Gothic" panose="020B0609070205080204" pitchFamily="49" charset="-128"/>
+                <a:ea typeface="MS Gothic" panose="020B0609070205080204" pitchFamily="49" charset="-128"/>
+              </a:rPr>
+              <a:t>other </a:t>
             </a:r>
             <a:r>
               <a:rPr lang="fr-FR" sz="1100" dirty="0" err="1">
